--- a/crypto_07_layer_2.pptx
+++ b/crypto_07_layer_2.pptx
@@ -5,11 +5,13 @@
     <p:sldMasterId id="2147483834" r:id="rId1"/>
   </p:sldMasterIdLst>
   <p:notesMasterIdLst>
-    <p:notesMasterId r:id="rId4"/>
+    <p:notesMasterId r:id="rId6"/>
   </p:notesMasterIdLst>
   <p:sldIdLst>
-    <p:sldId id="314" r:id="rId2"/>
-    <p:sldId id="294" r:id="rId3"/>
+    <p:sldId id="316" r:id="rId2"/>
+    <p:sldId id="314" r:id="rId3"/>
+    <p:sldId id="294" r:id="rId4"/>
+    <p:sldId id="315" r:id="rId5"/>
   </p:sldIdLst>
   <p:sldSz cx="12192000" cy="6858000"/>
   <p:notesSz cx="6858000" cy="9144000"/>
@@ -747,7 +749,7 @@
           <a:p>
             <a:fld id="{EB1FAE4C-5332-014D-8E1B-BB8DA73EF81D}" type="datetimeFigureOut">
               <a:rPr lang="en-US"/>
-              <a:t>5/2/22</a:t>
+              <a:t>5/5/22</a:t>
             </a:fld>
             <a:endParaRPr lang="en-US"/>
           </a:p>
@@ -917,7 +919,7 @@
           <a:p>
             <a:fld id="{EB1FAE4C-5332-014D-8E1B-BB8DA73EF81D}" type="datetimeFigureOut">
               <a:rPr lang="en-US"/>
-              <a:t>5/2/22</a:t>
+              <a:t>5/5/22</a:t>
             </a:fld>
             <a:endParaRPr lang="en-US"/>
           </a:p>
@@ -1097,7 +1099,7 @@
           <a:p>
             <a:fld id="{EB1FAE4C-5332-014D-8E1B-BB8DA73EF81D}" type="datetimeFigureOut">
               <a:rPr lang="en-US"/>
-              <a:t>5/2/22</a:t>
+              <a:t>5/5/22</a:t>
             </a:fld>
             <a:endParaRPr lang="en-US"/>
           </a:p>
@@ -1267,7 +1269,7 @@
           <a:p>
             <a:fld id="{EB1FAE4C-5332-014D-8E1B-BB8DA73EF81D}" type="datetimeFigureOut">
               <a:rPr lang="en-US"/>
-              <a:t>5/2/22</a:t>
+              <a:t>5/5/22</a:t>
             </a:fld>
             <a:endParaRPr lang="en-US"/>
           </a:p>
@@ -1514,7 +1516,7 @@
           <a:p>
             <a:fld id="{EB1FAE4C-5332-014D-8E1B-BB8DA73EF81D}" type="datetimeFigureOut">
               <a:rPr lang="en-US"/>
-              <a:t>5/2/22</a:t>
+              <a:t>5/5/22</a:t>
             </a:fld>
             <a:endParaRPr lang="en-US"/>
           </a:p>
@@ -1745,7 +1747,7 @@
           <a:p>
             <a:fld id="{EB1FAE4C-5332-014D-8E1B-BB8DA73EF81D}" type="datetimeFigureOut">
               <a:rPr lang="en-US"/>
-              <a:t>5/2/22</a:t>
+              <a:t>5/5/22</a:t>
             </a:fld>
             <a:endParaRPr lang="en-US"/>
           </a:p>
@@ -2111,7 +2113,7 @@
           <a:p>
             <a:fld id="{EB1FAE4C-5332-014D-8E1B-BB8DA73EF81D}" type="datetimeFigureOut">
               <a:rPr lang="en-US"/>
-              <a:t>5/2/22</a:t>
+              <a:t>5/5/22</a:t>
             </a:fld>
             <a:endParaRPr lang="en-US"/>
           </a:p>
@@ -2230,7 +2232,7 @@
           <a:p>
             <a:fld id="{EB1FAE4C-5332-014D-8E1B-BB8DA73EF81D}" type="datetimeFigureOut">
               <a:rPr lang="en-US"/>
-              <a:t>5/2/22</a:t>
+              <a:t>5/5/22</a:t>
             </a:fld>
             <a:endParaRPr lang="en-US"/>
           </a:p>
@@ -2327,7 +2329,7 @@
           <a:p>
             <a:fld id="{EB1FAE4C-5332-014D-8E1B-BB8DA73EF81D}" type="datetimeFigureOut">
               <a:rPr lang="en-US"/>
-              <a:t>5/2/22</a:t>
+              <a:t>5/5/22</a:t>
             </a:fld>
             <a:endParaRPr lang="en-US"/>
           </a:p>
@@ -2603,7 +2605,7 @@
           <a:p>
             <a:fld id="{EB1FAE4C-5332-014D-8E1B-BB8DA73EF81D}" type="datetimeFigureOut">
               <a:rPr lang="en-US"/>
-              <a:t>5/2/22</a:t>
+              <a:t>5/5/22</a:t>
             </a:fld>
             <a:endParaRPr lang="en-US"/>
           </a:p>
@@ -2860,7 +2862,7 @@
           <a:p>
             <a:fld id="{EB1FAE4C-5332-014D-8E1B-BB8DA73EF81D}" type="datetimeFigureOut">
               <a:rPr lang="en-US"/>
-              <a:t>5/2/22</a:t>
+              <a:t>5/5/22</a:t>
             </a:fld>
             <a:endParaRPr lang="en-US"/>
           </a:p>
@@ -3073,7 +3075,7 @@
           <a:p>
             <a:fld id="{EB1FAE4C-5332-014D-8E1B-BB8DA73EF81D}" type="datetimeFigureOut">
               <a:rPr lang="en-US"/>
-              <a:t>5/2/22</a:t>
+              <a:t>5/5/22</a:t>
             </a:fld>
             <a:endParaRPr lang="en-US"/>
           </a:p>
@@ -3490,6 +3492,71 @@
           <p:cNvPr id="2" name="TextBox 1">
             <a:extLst>
               <a:ext uri="{FF2B5EF4-FFF2-40B4-BE49-F238E27FC236}">
+                <a16:creationId xmlns:a16="http://schemas.microsoft.com/office/drawing/2014/main" id="{82DD2466-2CE7-FA22-5929-7509E4DF8C25}"/>
+              </a:ext>
+            </a:extLst>
+          </p:cNvPr>
+          <p:cNvSpPr txBox="1"/>
+          <p:nvPr/>
+        </p:nvSpPr>
+        <p:spPr>
+          <a:xfrm>
+            <a:off x="3689131" y="2175641"/>
+            <a:ext cx="4186990" cy="523220"/>
+          </a:xfrm>
+          <a:prstGeom prst="rect">
+            <a:avLst/>
+          </a:prstGeom>
+          <a:noFill/>
+        </p:spPr>
+        <p:txBody>
+          <a:bodyPr wrap="square" rtlCol="0">
+            <a:spAutoFit/>
+          </a:bodyPr>
+          <a:lstStyle/>
+          <a:p>
+            <a:r>
+              <a:rPr lang="en-US" sz="2800" b="1"/>
+              <a:t>What is Layer 2</a:t>
+            </a:r>
+          </a:p>
+        </p:txBody>
+      </p:sp>
+    </p:spTree>
+    <p:extLst>
+      <p:ext uri="{BB962C8B-B14F-4D97-AF65-F5344CB8AC3E}">
+        <p14:creationId xmlns:p14="http://schemas.microsoft.com/office/powerpoint/2010/main" val="1047359269"/>
+      </p:ext>
+    </p:extLst>
+  </p:cSld>
+  <p:clrMapOvr>
+    <a:masterClrMapping/>
+  </p:clrMapOvr>
+</p:sld>
+</file>
+
+<file path=ppt/slides/slide2.xml><?xml version="1.0" encoding="utf-8"?>
+<p:sld xmlns:a="http://schemas.openxmlformats.org/drawingml/2006/main" xmlns:r="http://schemas.openxmlformats.org/officeDocument/2006/relationships" xmlns:p="http://schemas.openxmlformats.org/presentationml/2006/main">
+  <p:cSld>
+    <p:spTree>
+      <p:nvGrpSpPr>
+        <p:cNvPr id="1" name=""/>
+        <p:cNvGrpSpPr/>
+        <p:nvPr/>
+      </p:nvGrpSpPr>
+      <p:grpSpPr>
+        <a:xfrm>
+          <a:off x="0" y="0"/>
+          <a:ext cx="0" cy="0"/>
+          <a:chOff x="0" y="0"/>
+          <a:chExt cx="0" cy="0"/>
+        </a:xfrm>
+      </p:grpSpPr>
+      <p:sp>
+        <p:nvSpPr>
+          <p:cNvPr id="2" name="TextBox 1">
+            <a:extLst>
+              <a:ext uri="{FF2B5EF4-FFF2-40B4-BE49-F238E27FC236}">
                 <a16:creationId xmlns:a16="http://schemas.microsoft.com/office/drawing/2014/main" id="{4736929E-1DCE-8C0B-503F-CE2CB5C81BFD}"/>
               </a:ext>
             </a:extLst>
@@ -4048,7 +4115,7 @@
 </p:sld>
 </file>
 
-<file path=ppt/slides/slide2.xml><?xml version="1.0" encoding="utf-8"?>
+<file path=ppt/slides/slide3.xml><?xml version="1.0" encoding="utf-8"?>
 <p:sld xmlns:a="http://schemas.openxmlformats.org/drawingml/2006/main" xmlns:r="http://schemas.openxmlformats.org/officeDocument/2006/relationships" xmlns:p="http://schemas.openxmlformats.org/presentationml/2006/main">
   <p:cSld>
     <p:spTree>
@@ -4503,6 +4570,71 @@
     <p:extLst>
       <p:ext uri="{BB962C8B-B14F-4D97-AF65-F5344CB8AC3E}">
         <p14:creationId xmlns:p14="http://schemas.microsoft.com/office/powerpoint/2010/main" val="3884162676"/>
+      </p:ext>
+    </p:extLst>
+  </p:cSld>
+  <p:clrMapOvr>
+    <a:masterClrMapping/>
+  </p:clrMapOvr>
+</p:sld>
+</file>
+
+<file path=ppt/slides/slide4.xml><?xml version="1.0" encoding="utf-8"?>
+<p:sld xmlns:a="http://schemas.openxmlformats.org/drawingml/2006/main" xmlns:r="http://schemas.openxmlformats.org/officeDocument/2006/relationships" xmlns:p="http://schemas.openxmlformats.org/presentationml/2006/main">
+  <p:cSld>
+    <p:spTree>
+      <p:nvGrpSpPr>
+        <p:cNvPr id="1" name=""/>
+        <p:cNvGrpSpPr/>
+        <p:nvPr/>
+      </p:nvGrpSpPr>
+      <p:grpSpPr>
+        <a:xfrm>
+          <a:off x="0" y="0"/>
+          <a:ext cx="0" cy="0"/>
+          <a:chOff x="0" y="0"/>
+          <a:chExt cx="0" cy="0"/>
+        </a:xfrm>
+      </p:grpSpPr>
+      <p:sp>
+        <p:nvSpPr>
+          <p:cNvPr id="2" name="TextBox 1">
+            <a:extLst>
+              <a:ext uri="{FF2B5EF4-FFF2-40B4-BE49-F238E27FC236}">
+                <a16:creationId xmlns:a16="http://schemas.microsoft.com/office/drawing/2014/main" id="{5CECBB80-68F5-9E1F-8BF2-8A3D65E6411C}"/>
+              </a:ext>
+            </a:extLst>
+          </p:cNvPr>
+          <p:cNvSpPr txBox="1"/>
+          <p:nvPr/>
+        </p:nvSpPr>
+        <p:spPr>
+          <a:xfrm>
+            <a:off x="472966" y="819807"/>
+            <a:ext cx="3531475" cy="369332"/>
+          </a:xfrm>
+          <a:prstGeom prst="rect">
+            <a:avLst/>
+          </a:prstGeom>
+          <a:noFill/>
+        </p:spPr>
+        <p:txBody>
+          <a:bodyPr wrap="square" rtlCol="0">
+            <a:spAutoFit/>
+          </a:bodyPr>
+          <a:lstStyle/>
+          <a:p>
+            <a:r>
+              <a:rPr lang="en-US"/>
+              <a:t>Stable Coin as Layer 2</a:t>
+            </a:r>
+          </a:p>
+        </p:txBody>
+      </p:sp>
+    </p:spTree>
+    <p:extLst>
+      <p:ext uri="{BB962C8B-B14F-4D97-AF65-F5344CB8AC3E}">
+        <p14:creationId xmlns:p14="http://schemas.microsoft.com/office/powerpoint/2010/main" val="3778390310"/>
       </p:ext>
     </p:extLst>
   </p:cSld>

--- a/crypto_07_layer_2.pptx
+++ b/crypto_07_layer_2.pptx
@@ -749,7 +749,7 @@
           <a:p>
             <a:fld id="{EB1FAE4C-5332-014D-8E1B-BB8DA73EF81D}" type="datetimeFigureOut">
               <a:rPr lang="en-US"/>
-              <a:t>5/5/22</a:t>
+              <a:t>5/20/22</a:t>
             </a:fld>
             <a:endParaRPr lang="en-US"/>
           </a:p>
@@ -919,7 +919,7 @@
           <a:p>
             <a:fld id="{EB1FAE4C-5332-014D-8E1B-BB8DA73EF81D}" type="datetimeFigureOut">
               <a:rPr lang="en-US"/>
-              <a:t>5/5/22</a:t>
+              <a:t>5/20/22</a:t>
             </a:fld>
             <a:endParaRPr lang="en-US"/>
           </a:p>
@@ -1099,7 +1099,7 @@
           <a:p>
             <a:fld id="{EB1FAE4C-5332-014D-8E1B-BB8DA73EF81D}" type="datetimeFigureOut">
               <a:rPr lang="en-US"/>
-              <a:t>5/5/22</a:t>
+              <a:t>5/20/22</a:t>
             </a:fld>
             <a:endParaRPr lang="en-US"/>
           </a:p>
@@ -1269,7 +1269,7 @@
           <a:p>
             <a:fld id="{EB1FAE4C-5332-014D-8E1B-BB8DA73EF81D}" type="datetimeFigureOut">
               <a:rPr lang="en-US"/>
-              <a:t>5/5/22</a:t>
+              <a:t>5/20/22</a:t>
             </a:fld>
             <a:endParaRPr lang="en-US"/>
           </a:p>
@@ -1516,7 +1516,7 @@
           <a:p>
             <a:fld id="{EB1FAE4C-5332-014D-8E1B-BB8DA73EF81D}" type="datetimeFigureOut">
               <a:rPr lang="en-US"/>
-              <a:t>5/5/22</a:t>
+              <a:t>5/20/22</a:t>
             </a:fld>
             <a:endParaRPr lang="en-US"/>
           </a:p>
@@ -1747,7 +1747,7 @@
           <a:p>
             <a:fld id="{EB1FAE4C-5332-014D-8E1B-BB8DA73EF81D}" type="datetimeFigureOut">
               <a:rPr lang="en-US"/>
-              <a:t>5/5/22</a:t>
+              <a:t>5/20/22</a:t>
             </a:fld>
             <a:endParaRPr lang="en-US"/>
           </a:p>
@@ -2113,7 +2113,7 @@
           <a:p>
             <a:fld id="{EB1FAE4C-5332-014D-8E1B-BB8DA73EF81D}" type="datetimeFigureOut">
               <a:rPr lang="en-US"/>
-              <a:t>5/5/22</a:t>
+              <a:t>5/20/22</a:t>
             </a:fld>
             <a:endParaRPr lang="en-US"/>
           </a:p>
@@ -2232,7 +2232,7 @@
           <a:p>
             <a:fld id="{EB1FAE4C-5332-014D-8E1B-BB8DA73EF81D}" type="datetimeFigureOut">
               <a:rPr lang="en-US"/>
-              <a:t>5/5/22</a:t>
+              <a:t>5/20/22</a:t>
             </a:fld>
             <a:endParaRPr lang="en-US"/>
           </a:p>
@@ -2329,7 +2329,7 @@
           <a:p>
             <a:fld id="{EB1FAE4C-5332-014D-8E1B-BB8DA73EF81D}" type="datetimeFigureOut">
               <a:rPr lang="en-US"/>
-              <a:t>5/5/22</a:t>
+              <a:t>5/20/22</a:t>
             </a:fld>
             <a:endParaRPr lang="en-US"/>
           </a:p>
@@ -2605,7 +2605,7 @@
           <a:p>
             <a:fld id="{EB1FAE4C-5332-014D-8E1B-BB8DA73EF81D}" type="datetimeFigureOut">
               <a:rPr lang="en-US"/>
-              <a:t>5/5/22</a:t>
+              <a:t>5/20/22</a:t>
             </a:fld>
             <a:endParaRPr lang="en-US"/>
           </a:p>
@@ -2862,7 +2862,7 @@
           <a:p>
             <a:fld id="{EB1FAE4C-5332-014D-8E1B-BB8DA73EF81D}" type="datetimeFigureOut">
               <a:rPr lang="en-US"/>
-              <a:t>5/5/22</a:t>
+              <a:t>5/20/22</a:t>
             </a:fld>
             <a:endParaRPr lang="en-US"/>
           </a:p>
@@ -3075,7 +3075,7 @@
           <a:p>
             <a:fld id="{EB1FAE4C-5332-014D-8E1B-BB8DA73EF81D}" type="datetimeFigureOut">
               <a:rPr lang="en-US"/>
-              <a:t>5/5/22</a:t>
+              <a:t>5/20/22</a:t>
             </a:fld>
             <a:endParaRPr lang="en-US"/>
           </a:p>
